--- a/reports/DiplomaPresentation.pptx
+++ b/reports/DiplomaPresentation.pptx
@@ -5,38 +5,38 @@
     <p:sldMasterId id="2147483648" r:id="rId1"/>
   </p:sldMasterIdLst>
   <p:notesMasterIdLst>
-    <p:notesMasterId r:id="rId29"/>
+    <p:notesMasterId r:id="rId4"/>
   </p:notesMasterIdLst>
   <p:handoutMasterIdLst>
     <p:handoutMasterId r:id="rId30"/>
   </p:handoutMasterIdLst>
   <p:sldIdLst>
     <p:sldId id="302" r:id="rId3"/>
-    <p:sldId id="2320" r:id="rId4"/>
-    <p:sldId id="535" r:id="rId5"/>
-    <p:sldId id="536" r:id="rId6"/>
-    <p:sldId id="2321" r:id="rId7"/>
-    <p:sldId id="2322" r:id="rId8"/>
-    <p:sldId id="2323" r:id="rId9"/>
-    <p:sldId id="2324" r:id="rId10"/>
-    <p:sldId id="2325" r:id="rId11"/>
-    <p:sldId id="2327" r:id="rId12"/>
-    <p:sldId id="2326" r:id="rId13"/>
-    <p:sldId id="2328" r:id="rId14"/>
-    <p:sldId id="2329" r:id="rId15"/>
-    <p:sldId id="2330" r:id="rId16"/>
-    <p:sldId id="2331" r:id="rId17"/>
-    <p:sldId id="2332" r:id="rId18"/>
-    <p:sldId id="2335" r:id="rId19"/>
-    <p:sldId id="2334" r:id="rId20"/>
-    <p:sldId id="2336" r:id="rId21"/>
-    <p:sldId id="2337" r:id="rId22"/>
-    <p:sldId id="2338" r:id="rId23"/>
-    <p:sldId id="2339" r:id="rId24"/>
-    <p:sldId id="2340" r:id="rId25"/>
-    <p:sldId id="2341" r:id="rId26"/>
-    <p:sldId id="2342" r:id="rId27"/>
-    <p:sldId id="2343" r:id="rId28"/>
+    <p:sldId id="2320" r:id="rId5"/>
+    <p:sldId id="535" r:id="rId6"/>
+    <p:sldId id="536" r:id="rId7"/>
+    <p:sldId id="2321" r:id="rId8"/>
+    <p:sldId id="2322" r:id="rId9"/>
+    <p:sldId id="2323" r:id="rId10"/>
+    <p:sldId id="2324" r:id="rId11"/>
+    <p:sldId id="2325" r:id="rId12"/>
+    <p:sldId id="2327" r:id="rId13"/>
+    <p:sldId id="2326" r:id="rId14"/>
+    <p:sldId id="2328" r:id="rId15"/>
+    <p:sldId id="2329" r:id="rId16"/>
+    <p:sldId id="2330" r:id="rId17"/>
+    <p:sldId id="2331" r:id="rId18"/>
+    <p:sldId id="2332" r:id="rId19"/>
+    <p:sldId id="2335" r:id="rId20"/>
+    <p:sldId id="2334" r:id="rId21"/>
+    <p:sldId id="2336" r:id="rId22"/>
+    <p:sldId id="2337" r:id="rId23"/>
+    <p:sldId id="2338" r:id="rId24"/>
+    <p:sldId id="2339" r:id="rId25"/>
+    <p:sldId id="2340" r:id="rId26"/>
+    <p:sldId id="2341" r:id="rId27"/>
+    <p:sldId id="2342" r:id="rId28"/>
+    <p:sldId id="2343" r:id="rId29"/>
   </p:sldIdLst>
   <p:sldSz cx="9144000" cy="5143500" type="screen16x9"/>
   <p:notesSz cx="6858000" cy="9144000"/>
@@ -143,7 +143,7 @@
             <a:srgbClr val="A4A3A4"/>
           </p15:clr>
         </p15:guide>
-        <p15:guide id="2" pos="2880" userDrawn="1">
+        <p15:guide id="2" pos="2854" userDrawn="1">
           <p15:clr>
             <a:srgbClr val="A4A3A4"/>
           </p15:clr>
@@ -657,6 +657,54 @@
     </a:lvl9pPr>
   </p:notesStyle>
 </p:notesMaster>
+</file>
+
+<file path=ppt/notesSlides/notesSlide1.xml><?xml version="1.0" encoding="utf-8"?>
+<p:notes xmlns:a="http://schemas.openxmlformats.org/drawingml/2006/main" xmlns:r="http://schemas.openxmlformats.org/officeDocument/2006/relationships" xmlns:p="http://schemas.openxmlformats.org/presentationml/2006/main">
+  <p:cSld>
+    <p:spTree>
+      <p:nvGrpSpPr>
+        <p:cNvPr id="1" name=""/>
+        <p:cNvGrpSpPr/>
+        <p:nvPr/>
+      </p:nvGrpSpPr>
+      <p:grpSpPr/>
+      <p:sp>
+        <p:nvSpPr>
+          <p:cNvPr id="2" name="Замещающий образ слайда 1"/>
+          <p:cNvSpPr>
+            <a:spLocks noGrp="1"/>
+          </p:cNvSpPr>
+          <p:nvPr>
+            <p:ph type="sldImg" idx="2"/>
+          </p:nvPr>
+        </p:nvSpPr>
+        <p:spPr/>
+      </p:sp>
+      <p:sp>
+        <p:nvSpPr>
+          <p:cNvPr id="3" name="Замещающий текст 2"/>
+          <p:cNvSpPr>
+            <a:spLocks noGrp="1"/>
+          </p:cNvSpPr>
+          <p:nvPr>
+            <p:ph type="body" idx="3"/>
+          </p:nvPr>
+        </p:nvSpPr>
+        <p:spPr/>
+        <p:txBody>
+          <a:bodyPr/>
+          <a:p>
+            <a:endParaRPr lang="ru-RU" altLang="en-US"/>
+          </a:p>
+        </p:txBody>
+      </p:sp>
+    </p:spTree>
+  </p:cSld>
+  <p:clrMapOvr>
+    <a:masterClrMapping/>
+  </p:clrMapOvr>
+</p:notes>
 </file>
 
 <file path=ppt/slideLayouts/slideLayout1.xml><?xml version="1.0" encoding="utf-8"?>
@@ -7715,7 +7763,7 @@
         </p:blipFill>
         <p:spPr>
           <a:xfrm>
-            <a:off x="591820" y="662305"/>
+            <a:off x="591820" y="177165"/>
             <a:ext cx="2096135" cy="671195"/>
           </a:xfrm>
           <a:prstGeom prst="rect">
@@ -7740,7 +7788,7 @@
         </p:blipFill>
         <p:spPr>
           <a:xfrm>
-            <a:off x="1007110" y="1311275"/>
+            <a:off x="1007110" y="848360"/>
             <a:ext cx="2840355" cy="713105"/>
           </a:xfrm>
           <a:prstGeom prst="rect">
@@ -7853,7 +7901,7 @@
         </p:blipFill>
         <p:spPr>
           <a:xfrm>
-            <a:off x="179070" y="2518410"/>
+            <a:off x="664210" y="1213485"/>
             <a:ext cx="5082540" cy="2510790"/>
           </a:xfrm>
           <a:prstGeom prst="rect">
@@ -7971,7 +8019,7 @@
         </p:blipFill>
         <p:spPr>
           <a:xfrm>
-            <a:off x="4439285" y="1213485"/>
+            <a:off x="4601210" y="1213485"/>
             <a:ext cx="2949575" cy="979170"/>
           </a:xfrm>
           <a:prstGeom prst="rect">
